--- a/docs/山本竜三　自己紹介.pptx
+++ b/docs/山本竜三　自己紹介.pptx
@@ -216,7 +216,7 @@
           <a:p>
             <a:fld id="{CA49738D-D75D-40B1-BF46-FC9ACBB15E75}" type="datetimeFigureOut">
               <a:rPr kumimoji="1" lang="ja-JP" altLang="en-US" smtClean="0"/>
-              <a:t>2025/4/13</a:t>
+              <a:t>2026/9/1</a:t>
             </a:fld>
             <a:endParaRPr kumimoji="1" lang="ja-JP" altLang="en-US"/>
           </a:p>
@@ -4484,7 +4484,7 @@
           <p:nvPr>
             <p:extLst>
               <p:ext uri="{D42A27DB-BD31-4B8C-83A1-F6EECF244321}">
-                <p14:modId xmlns:p14="http://schemas.microsoft.com/office/powerpoint/2010/main" val="2089439081"/>
+                <p14:modId xmlns:p14="http://schemas.microsoft.com/office/powerpoint/2010/main" val="1098385113"/>
               </p:ext>
             </p:extLst>
           </p:nvPr>
@@ -6182,7 +6182,7 @@
                             <a:schemeClr val="tx1"/>
                           </a:solidFill>
                         </a:rPr>
-                        <a:t>建設技術研究所</a:t>
+                        <a:t>都内建設ｺﾝｻﾙﾀﾝﾄ</a:t>
                       </a:r>
                     </a:p>
                   </a:txBody>
@@ -18955,14 +18955,14 @@
           <p:nvPr>
             <p:extLst>
               <p:ext uri="{D42A27DB-BD31-4B8C-83A1-F6EECF244321}">
-                <p14:modId xmlns:p14="http://schemas.microsoft.com/office/powerpoint/2010/main" val="2987472819"/>
+                <p14:modId xmlns:p14="http://schemas.microsoft.com/office/powerpoint/2010/main" val="3317815785"/>
               </p:ext>
             </p:extLst>
           </p:nvPr>
         </p:nvGraphicFramePr>
         <p:xfrm>
-          <a:off x="4151784" y="143664"/>
-          <a:ext cx="7632846" cy="1341120"/>
+          <a:off x="4151784" y="69145"/>
+          <a:ext cx="7632846" cy="1493520"/>
         </p:xfrm>
         <a:graphic>
           <a:graphicData uri="http://schemas.openxmlformats.org/drawingml/2006/table">
@@ -19266,6 +19266,52 @@
                           <a:ea typeface="游ゴシック" panose="020B0400000000000000" pitchFamily="50" charset="-128"/>
                         </a:rPr>
                         <a:t>測量士</a:t>
+                      </a:r>
+                      <a:endParaRPr kumimoji="1" lang="en-US" altLang="ja-JP" sz="1600" b="1" dirty="0">
+                        <a:solidFill>
+                          <a:srgbClr val="0070C0"/>
+                        </a:solidFill>
+                        <a:latin typeface="游ゴシック" panose="020B0400000000000000" pitchFamily="50" charset="-128"/>
+                        <a:ea typeface="游ゴシック" panose="020B0400000000000000" pitchFamily="50" charset="-128"/>
+                      </a:endParaRPr>
+                    </a:p>
+                    <a:p>
+                      <a:pPr marL="0" marR="0" lvl="0" indent="0" algn="ctr" defTabSz="914400" rtl="0" eaLnBrk="1" fontAlgn="auto" latinLnBrk="0" hangingPunct="1">
+                        <a:lnSpc>
+                          <a:spcPct val="100000"/>
+                        </a:lnSpc>
+                        <a:spcBef>
+                          <a:spcPts val="0"/>
+                        </a:spcBef>
+                        <a:spcAft>
+                          <a:spcPts val="0"/>
+                        </a:spcAft>
+                        <a:buClrTx/>
+                        <a:buSzTx/>
+                        <a:buFontTx/>
+                        <a:buNone/>
+                        <a:tabLst/>
+                        <a:defRPr/>
+                      </a:pPr>
+                      <a:r>
+                        <a:rPr kumimoji="1" lang="en-US" altLang="ja-JP" sz="1600" b="1" dirty="0">
+                          <a:solidFill>
+                            <a:srgbClr val="0070C0"/>
+                          </a:solidFill>
+                          <a:latin typeface="游ゴシック" panose="020B0400000000000000" pitchFamily="50" charset="-128"/>
+                          <a:ea typeface="游ゴシック" panose="020B0400000000000000" pitchFamily="50" charset="-128"/>
+                        </a:rPr>
+                        <a:t>BIM/CIM</a:t>
+                      </a:r>
+                      <a:r>
+                        <a:rPr kumimoji="1" lang="ja-JP" altLang="en-US" sz="1600" b="1" dirty="0">
+                          <a:solidFill>
+                            <a:srgbClr val="0070C0"/>
+                          </a:solidFill>
+                          <a:latin typeface="游ゴシック" panose="020B0400000000000000" pitchFamily="50" charset="-128"/>
+                          <a:ea typeface="游ゴシック" panose="020B0400000000000000" pitchFamily="50" charset="-128"/>
+                        </a:rPr>
+                        <a:t>管理技士</a:t>
                       </a:r>
                       <a:endParaRPr kumimoji="1" lang="zh-TW" altLang="en-US" sz="1600" b="1" dirty="0">
                         <a:solidFill>
